--- a/backend/artifacts/report.pptx
+++ b/backend/artifacts/report.pptx
@@ -3207,7 +3207,7 @@
                   <a:srgbClr val="AAC4E0"/>
                 </a:solidFill>
               </a:rPr>
-              <a:t>Sovereign AI Engineering Workbench  |  2026-09-15 07:01 UTC</a:t>
+              <a:t>Sovereign AI Engineering Workbench  |  2026-09-15 16:13 UTC</a:t>
             </a:r>
           </a:p>
         </p:txBody>

--- a/backend/artifacts/report.pptx
+++ b/backend/artifacts/report.pptx
@@ -3207,7 +3207,7 @@
                   <a:srgbClr val="AAC4E0"/>
                 </a:solidFill>
               </a:rPr>
-              <a:t>Sovereign AI Engineering Workbench  |  2026-09-15 16:13 UTC</a:t>
+              <a:t>Sovereign AI Engineering Workbench  |  2026-09-16 06:25 UTC</a:t>
             </a:r>
           </a:p>
         </p:txBody>

--- a/backend/artifacts/report.pptx
+++ b/backend/artifacts/report.pptx
@@ -3207,7 +3207,7 @@
                   <a:srgbClr val="AAC4E0"/>
                 </a:solidFill>
               </a:rPr>
-              <a:t>Sovereign AI Engineering Workbench  |  2026-09-15 07:01 UTC</a:t>
+              <a:t>Sovereign AI Engineering Workbench  |  2026-09-16 16:20 UTC</a:t>
             </a:r>
           </a:p>
         </p:txBody>
